--- a/assets/pptx/catalog-331.pptx
+++ b/assets/pptx/catalog-331.pptx
@@ -3476,7 +3476,7 @@
                 <a:ea typeface="Ebrima"/>
                 <a:cs typeface="Ebrima"/>
               </a:rPr>
-              <a:t>አለህ አዳኜ (4x)</a:t>
+              <a:t>አለህ አዳኜ 4x</a:t>
             </a:r>
           </a:p>
         </p:txBody>
@@ -3543,7 +3543,7 @@
                 <a:ea typeface="Ebrima"/>
                 <a:cs typeface="Ebrima"/>
               </a:rPr>
-              <a:t>የረዳኝን ያገዘኝን እግዚአብሔርን አመልካለሁ (2x)</a:t>
+              <a:t>የረዳኝን ያገዘኝን እግዚአብሔርን አመልካለሁ 2x</a:t>
             </a:r>
           </a:p>
           <a:p>
@@ -3561,7 +3561,7 @@
                 <a:ea typeface="Ebrima"/>
                 <a:cs typeface="Ebrima"/>
               </a:rPr>
-              <a:t>የረዳኝ አቅም የሆነከኝ እግዚአብሔርን አመልካለሁ (2x)</a:t>
+              <a:t>የረዳኝ አቅም የሆነከኝ እግዚአብሔርን አመልካለሁ 2x</a:t>
             </a:r>
           </a:p>
         </p:txBody>
@@ -3700,7 +3700,7 @@
                 <a:ea typeface="Ebrima"/>
                 <a:cs typeface="Ebrima"/>
               </a:rPr>
-              <a:t>እጆቼን ይዘህ (4x)</a:t>
+              <a:t>እጆቼን ይዘህ 4x</a:t>
             </a:r>
           </a:p>
         </p:txBody>
@@ -3996,7 +3996,7 @@
                 <a:ea typeface="Ebrima"/>
                 <a:cs typeface="Ebrima"/>
               </a:rPr>
-              <a:t>እጆቼን ይዘህ (4x)</a:t>
+              <a:t>እጆቼን ይዘህ 4x</a:t>
             </a:r>
           </a:p>
         </p:txBody>
@@ -4063,7 +4063,7 @@
                 <a:ea typeface="Ebrima"/>
                 <a:cs typeface="Ebrima"/>
               </a:rPr>
-              <a:t>የረዳኝን ያገዘኝን እግዚአብሔርን አመልካለሁ (2x)</a:t>
+              <a:t>የረዳኝን ያገዘኝን እግዚአብሔርን አመልካለሁ 2x</a:t>
             </a:r>
           </a:p>
           <a:p>
@@ -4081,7 +4081,7 @@
                 <a:ea typeface="Ebrima"/>
                 <a:cs typeface="Ebrima"/>
               </a:rPr>
-              <a:t>የረዳኝ አቅም የሆነከኝ እግዚአብሔርን አመልካለሁ (2x)</a:t>
+              <a:t>የረዳኝ አቅም የሆነከኝ እግዚአብሔርን አመልካለሁ 2x</a:t>
             </a:r>
           </a:p>
           <a:p>
@@ -4315,7 +4315,7 @@
                 <a:ea typeface="Ebrima"/>
                 <a:cs typeface="Ebrima"/>
               </a:rPr>
-              <a:t>አመልካለሁ (8x)</a:t>
+              <a:t>አመልካለሁ 8x</a:t>
             </a:r>
           </a:p>
         </p:txBody>
